--- a/deck/presentation.pptx
+++ b/deck/presentation.pptx
@@ -11,9 +11,10 @@
     <p:sldId id="259" r:id="rId5"/>
     <p:sldId id="260" r:id="rId6"/>
     <p:sldId id="261" r:id="rId7"/>
+    <p:sldId id="262" r:id="rId8"/>
   </p:sldIdLst>
   <p:notesMasterIdLst>
-    <p:notesMasterId r:id="rId8"/>
+    <p:notesMasterId r:id="rId9"/>
   </p:notesMasterIdLst>
   <p:sldSz cx="12192000" cy="6858000"/>
   <p:notesSz cx="6858000" cy="12192000"/>
@@ -859,7 +860,7 @@
           <a:p>
             <a:r>
               <a:rPr lang="en-US" dirty="0"/>
-              <a:t>Point at the three orders matching theory. The trap callout is a good spot for a question - invite it if the room is quiet.</a:t>
+              <a:t>This is the software architecture, not the numerical method — configs drive the runner, the runner calls the hand-written core library, results are cached JSON, and the same JSON feeds both the report figures and the live dashboard. Mention the deployed link here if doing a live demo.</a:t>
             </a:r>
             <a:endParaRPr lang="en-US" dirty="0"/>
           </a:p>
@@ -947,7 +948,7 @@
           <a:p>
             <a:r>
               <a:rPr lang="en-US" dirty="0"/>
-              <a:t>Restate the one-line conclusion without reading it verbatim. Every member should be ready to speak to their own row when asked individually.</a:t>
+              <a:t>Point at the three orders matching theory. The trap callout is a good spot for a question - invite it if the room is quiet.</a:t>
             </a:r>
             <a:endParaRPr lang="en-US" dirty="0"/>
           </a:p>
@@ -971,6 +972,94 @@
             <a:fld id="{F7021451-1387-4CA6-816F-3879F97B5CBC}" type="slidenum">
               <a:rPr lang="en-US"/>
               <a:t>6</a:t>
+            </a:fld>
+            <a:endParaRPr lang="en-US"/>
+          </a:p>
+        </p:txBody>
+      </p:sp>
+    </p:spTree>
+    <p:extLst>
+      <p:ext uri="{BB962C8B-B14F-4D97-AF65-F5344CB8AC3E}">
+        <p14:creationId xmlns:p14="http://schemas.microsoft.com/office/powerpoint/2010/main" val="1024086991"/>
+      </p:ext>
+    </p:extLst>
+  </p:cSld>
+  <p:clrMapOvr>
+    <a:masterClrMapping/>
+  </p:clrMapOvr>
+</p:notes>
+</file>
+
+<file path=ppt/notesSlides/notesSlide7.xml><?xml version="1.0" encoding="utf-8"?>
+<p:notes xmlns:a="http://schemas.openxmlformats.org/drawingml/2006/main" xmlns:r="http://schemas.openxmlformats.org/officeDocument/2006/relationships" xmlns:p="http://schemas.openxmlformats.org/presentationml/2006/main">
+  <p:cSld>
+    <p:spTree>
+      <p:nvGrpSpPr>
+        <p:cNvPr id="1" name=""/>
+        <p:cNvGrpSpPr/>
+        <p:nvPr/>
+      </p:nvGrpSpPr>
+      <p:grpSpPr>
+        <a:xfrm>
+          <a:off x="0" y="0"/>
+          <a:ext cx="0" cy="0"/>
+          <a:chOff x="0" y="0"/>
+          <a:chExt cx="0" cy="0"/>
+        </a:xfrm>
+      </p:grpSpPr>
+      <p:sp>
+        <p:nvSpPr>
+          <p:cNvPr id="2" name="Slide Image Placeholder 1"/>
+          <p:cNvSpPr>
+            <a:spLocks noGrp="1" noRot="1" noChangeAspect="1"/>
+          </p:cNvSpPr>
+          <p:nvPr>
+            <p:ph type="sldImg"/>
+          </p:nvPr>
+        </p:nvSpPr>
+        <p:spPr/>
+      </p:sp>
+      <p:sp>
+        <p:nvSpPr>
+          <p:cNvPr id="3" name="Notes Placeholder 2"/>
+          <p:cNvSpPr>
+            <a:spLocks noGrp="1"/>
+          </p:cNvSpPr>
+          <p:nvPr>
+            <p:ph type="body" idx="1"/>
+          </p:nvPr>
+        </p:nvSpPr>
+        <p:spPr/>
+        <p:txBody>
+          <a:bodyPr/>
+          <a:lstStyle/>
+          <a:p>
+            <a:r>
+              <a:rPr lang="en-US" dirty="0"/>
+              <a:t>Restate the one-line conclusion without reading it verbatim. Every member should be ready to speak to their own row when asked individually.</a:t>
+            </a:r>
+            <a:endParaRPr lang="en-US" dirty="0"/>
+          </a:p>
+        </p:txBody>
+      </p:sp>
+      <p:sp>
+        <p:nvSpPr>
+          <p:cNvPr id="4" name="Slide Number Placeholder 3"/>
+          <p:cNvSpPr>
+            <a:spLocks noGrp="1"/>
+          </p:cNvSpPr>
+          <p:nvPr>
+            <p:ph type="sldNum" sz="quarter" idx="10"/>
+          </p:nvPr>
+        </p:nvSpPr>
+        <p:spPr/>
+        <p:txBody>
+          <a:bodyPr/>
+          <a:lstStyle/>
+          <a:p>
+            <a:fld id="{F7021451-1387-4CA6-816F-3879F97B5CBC}" type="slidenum">
+              <a:rPr lang="en-US"/>
+              <a:t>7</a:t>
             </a:fld>
             <a:endParaRPr lang="en-US"/>
           </a:p>
@@ -5010,7 +5099,7 @@
                 <a:ea typeface="Calibri" pitchFamily="34" charset="-122"/>
                 <a:cs typeface="Calibri" pitchFamily="34" charset="-120"/>
               </a:rPr>
-              <a:t>WHAT WE FOUND</a:t>
+              <a:t>UNDER THE HOOD</a:t>
             </a:r>
             <a:endParaRPr lang="en-US" sz="1250" dirty="0"/>
           </a:p>
@@ -5049,7 +5138,7 @@
                 <a:ea typeface="Cambria" pitchFamily="34" charset="-122"/>
                 <a:cs typeface="Cambria" pitchFamily="34" charset="-120"/>
               </a:rPr>
-              <a:t>Solver error behaves exactly like the textbook says</a:t>
+              <a:t>How one config file becomes a live result</a:t>
             </a:r>
             <a:endParaRPr lang="en-US" sz="2500" dirty="0"/>
           </a:p>
@@ -5063,12 +5152,12 @@
         </p:nvSpPr>
         <p:spPr>
           <a:xfrm>
-            <a:off x="393192" y="1627632"/>
-            <a:ext cx="6025896" cy="5107573"/>
+            <a:off x="3992728" y="1691640"/>
+            <a:ext cx="4206240" cy="530352"/>
           </a:xfrm>
           <a:prstGeom prst="roundRect">
             <a:avLst>
-              <a:gd name="adj" fmla="val 1074"/>
+              <a:gd name="adj" fmla="val 12069"/>
             </a:avLst>
           </a:prstGeom>
           <a:solidFill>
@@ -5089,6 +5178,1210 @@
           </a:effectLst>
         </p:spPr>
       </p:sp>
+      <p:sp>
+        <p:nvSpPr>
+          <p:cNvPr id="5" name="Text 3"/>
+          <p:cNvSpPr txBox="1"/>
+          <p:nvPr/>
+        </p:nvSpPr>
+        <p:spPr>
+          <a:xfrm>
+            <a:off x="4221328" y="1691640"/>
+            <a:ext cx="3749040" cy="291694"/>
+          </a:xfrm>
+          <a:prstGeom prst="rect">
+            <a:avLst/>
+          </a:prstGeom>
+          <a:noFill/>
+          <a:ln/>
+        </p:spPr>
+        <p:txBody>
+          <a:bodyPr wrap="square" lIns="0" tIns="0" rIns="0" bIns="0" rtlCol="0" anchor="b"/>
+          <a:lstStyle/>
+          <a:p>
+            <a:pPr algn="ctr" indent="0" marL="0">
+              <a:buNone/>
+            </a:pPr>
+            <a:r>
+              <a:rPr lang="en-US" sz="1350" b="1" dirty="0">
+                <a:solidFill>
+                  <a:srgbClr val="131A24"/>
+                </a:solidFill>
+                <a:latin typeface="Calibri" pitchFamily="34" charset="0"/>
+                <a:ea typeface="Calibri" pitchFamily="34" charset="-122"/>
+                <a:cs typeface="Calibri" pitchFamily="34" charset="-120"/>
+              </a:rPr>
+              <a:t>configs/*.yaml</a:t>
+            </a:r>
+            <a:endParaRPr lang="en-US" sz="1350" dirty="0"/>
+          </a:p>
+        </p:txBody>
+      </p:sp>
+      <p:sp>
+        <p:nvSpPr>
+          <p:cNvPr id="6" name="Text 4"/>
+          <p:cNvSpPr txBox="1"/>
+          <p:nvPr/>
+        </p:nvSpPr>
+        <p:spPr>
+          <a:xfrm>
+            <a:off x="4221328" y="1956816"/>
+            <a:ext cx="3749040" cy="238658"/>
+          </a:xfrm>
+          <a:prstGeom prst="rect">
+            <a:avLst/>
+          </a:prstGeom>
+          <a:noFill/>
+          <a:ln/>
+        </p:spPr>
+        <p:txBody>
+          <a:bodyPr wrap="square" lIns="0" tIns="0" rIns="0" bIns="0" rtlCol="0" anchor="t"/>
+          <a:lstStyle/>
+          <a:p>
+            <a:pPr algn="ctr" indent="0" marL="0">
+              <a:buNone/>
+            </a:pPr>
+            <a:r>
+              <a:rPr lang="en-US" sz="1000" dirty="0">
+                <a:solidFill>
+                  <a:srgbClr val="7C8AA0"/>
+                </a:solidFill>
+                <a:latin typeface="Courier New" pitchFamily="34" charset="0"/>
+                <a:ea typeface="Courier New" pitchFamily="34" charset="-122"/>
+                <a:cs typeface="Courier New" pitchFamily="34" charset="-120"/>
+              </a:rPr>
+              <a:t>one config per experiment — quick &amp; full profiles</a:t>
+            </a:r>
+            <a:endParaRPr lang="en-US" sz="1000" dirty="0"/>
+          </a:p>
+        </p:txBody>
+      </p:sp>
+      <p:sp>
+        <p:nvSpPr>
+          <p:cNvPr id="7" name="Text 5"/>
+          <p:cNvSpPr txBox="1"/>
+          <p:nvPr/>
+        </p:nvSpPr>
+        <p:spPr>
+          <a:xfrm>
+            <a:off x="5821528" y="2240280"/>
+            <a:ext cx="548640" cy="256032"/>
+          </a:xfrm>
+          <a:prstGeom prst="rect">
+            <a:avLst/>
+          </a:prstGeom>
+          <a:noFill/>
+          <a:ln/>
+        </p:spPr>
+        <p:txBody>
+          <a:bodyPr wrap="square" lIns="0" tIns="0" rIns="0" bIns="0" rtlCol="0" anchor="ctr"/>
+          <a:lstStyle/>
+          <a:p>
+            <a:pPr algn="ctr" indent="0" marL="0">
+              <a:buNone/>
+            </a:pPr>
+            <a:r>
+              <a:rPr lang="en-US" sz="1600" dirty="0">
+                <a:solidFill>
+                  <a:srgbClr val="7C8AA0"/>
+                </a:solidFill>
+                <a:latin typeface="Calibri" pitchFamily="34" charset="0"/>
+                <a:ea typeface="Calibri" pitchFamily="34" charset="-122"/>
+                <a:cs typeface="Calibri" pitchFamily="34" charset="-120"/>
+              </a:rPr>
+              <a:t>↓</a:t>
+            </a:r>
+            <a:endParaRPr lang="en-US" sz="1600" dirty="0"/>
+          </a:p>
+        </p:txBody>
+      </p:sp>
+      <p:sp>
+        <p:nvSpPr>
+          <p:cNvPr id="8" name="Shape 6"/>
+          <p:cNvSpPr/>
+          <p:nvPr/>
+        </p:nvSpPr>
+        <p:spPr>
+          <a:xfrm>
+            <a:off x="3992728" y="2514600"/>
+            <a:ext cx="4206240" cy="530352"/>
+          </a:xfrm>
+          <a:prstGeom prst="roundRect">
+            <a:avLst>
+              <a:gd name="adj" fmla="val 12069"/>
+            </a:avLst>
+          </a:prstGeom>
+          <a:solidFill>
+            <a:srgbClr val="FFFFFF"/>
+          </a:solidFill>
+          <a:ln w="12700">
+            <a:solidFill>
+              <a:srgbClr val="DDE3EC"/>
+            </a:solidFill>
+            <a:prstDash val="solid"/>
+          </a:ln>
+          <a:effectLst>
+            <a:outerShdw sx="100000" sy="100000" kx="0" ky="0" algn="bl" rotWithShape="0" blurRad="88900" dist="25400" dir="5400000">
+              <a:srgbClr val="131A24">
+                <a:alpha val="16000"/>
+              </a:srgbClr>
+            </a:outerShdw>
+          </a:effectLst>
+        </p:spPr>
+      </p:sp>
+      <p:sp>
+        <p:nvSpPr>
+          <p:cNvPr id="9" name="Text 7"/>
+          <p:cNvSpPr txBox="1"/>
+          <p:nvPr/>
+        </p:nvSpPr>
+        <p:spPr>
+          <a:xfrm>
+            <a:off x="4221328" y="2514600"/>
+            <a:ext cx="3749040" cy="291694"/>
+          </a:xfrm>
+          <a:prstGeom prst="rect">
+            <a:avLst/>
+          </a:prstGeom>
+          <a:noFill/>
+          <a:ln/>
+        </p:spPr>
+        <p:txBody>
+          <a:bodyPr wrap="square" lIns="0" tIns="0" rIns="0" bIns="0" rtlCol="0" anchor="b"/>
+          <a:lstStyle/>
+          <a:p>
+            <a:pPr algn="ctr" indent="0" marL="0">
+              <a:buNone/>
+            </a:pPr>
+            <a:r>
+              <a:rPr lang="en-US" sz="1350" b="1" dirty="0">
+                <a:solidFill>
+                  <a:srgbClr val="131A24"/>
+                </a:solidFill>
+                <a:latin typeface="Calibri" pitchFamily="34" charset="0"/>
+                <a:ea typeface="Calibri" pitchFamily="34" charset="-122"/>
+                <a:cs typeface="Calibri" pitchFamily="34" charset="-120"/>
+              </a:rPr>
+              <a:t>experiment runner</a:t>
+            </a:r>
+            <a:endParaRPr lang="en-US" sz="1350" dirty="0"/>
+          </a:p>
+        </p:txBody>
+      </p:sp>
+      <p:sp>
+        <p:nvSpPr>
+          <p:cNvPr id="10" name="Text 8"/>
+          <p:cNvSpPr txBox="1"/>
+          <p:nvPr/>
+        </p:nvSpPr>
+        <p:spPr>
+          <a:xfrm>
+            <a:off x="4221328" y="2779776"/>
+            <a:ext cx="3749040" cy="238658"/>
+          </a:xfrm>
+          <a:prstGeom prst="rect">
+            <a:avLst/>
+          </a:prstGeom>
+          <a:noFill/>
+          <a:ln/>
+        </p:spPr>
+        <p:txBody>
+          <a:bodyPr wrap="square" lIns="0" tIns="0" rIns="0" bIns="0" rtlCol="0" anchor="t"/>
+          <a:lstStyle/>
+          <a:p>
+            <a:pPr algn="ctr" indent="0" marL="0">
+              <a:buNone/>
+            </a:pPr>
+            <a:r>
+              <a:rPr lang="en-US" sz="1000" dirty="0">
+                <a:solidFill>
+                  <a:srgbClr val="7C8AA0"/>
+                </a:solidFill>
+                <a:latin typeface="Courier New" pitchFamily="34" charset="0"/>
+                <a:ea typeface="Courier New" pitchFamily="34" charset="-122"/>
+                <a:cs typeface="Courier New" pitchFamily="34" charset="-120"/>
+              </a:rPr>
+              <a:t>experiments/registry.py routes E01 – E14</a:t>
+            </a:r>
+            <a:endParaRPr lang="en-US" sz="1000" dirty="0"/>
+          </a:p>
+        </p:txBody>
+      </p:sp>
+      <p:sp>
+        <p:nvSpPr>
+          <p:cNvPr id="11" name="Text 9"/>
+          <p:cNvSpPr txBox="1"/>
+          <p:nvPr/>
+        </p:nvSpPr>
+        <p:spPr>
+          <a:xfrm>
+            <a:off x="5821528" y="3063240"/>
+            <a:ext cx="548640" cy="256032"/>
+          </a:xfrm>
+          <a:prstGeom prst="rect">
+            <a:avLst/>
+          </a:prstGeom>
+          <a:noFill/>
+          <a:ln/>
+        </p:spPr>
+        <p:txBody>
+          <a:bodyPr wrap="square" lIns="0" tIns="0" rIns="0" bIns="0" rtlCol="0" anchor="ctr"/>
+          <a:lstStyle/>
+          <a:p>
+            <a:pPr algn="ctr" indent="0" marL="0">
+              <a:buNone/>
+            </a:pPr>
+            <a:r>
+              <a:rPr lang="en-US" sz="1600" dirty="0">
+                <a:solidFill>
+                  <a:srgbClr val="7C8AA0"/>
+                </a:solidFill>
+                <a:latin typeface="Calibri" pitchFamily="34" charset="0"/>
+                <a:ea typeface="Calibri" pitchFamily="34" charset="-122"/>
+                <a:cs typeface="Calibri" pitchFamily="34" charset="-120"/>
+              </a:rPr>
+              <a:t>↓</a:t>
+            </a:r>
+            <a:endParaRPr lang="en-US" sz="1600" dirty="0"/>
+          </a:p>
+        </p:txBody>
+      </p:sp>
+      <p:sp>
+        <p:nvSpPr>
+          <p:cNvPr id="12" name="Shape 10"/>
+          <p:cNvSpPr/>
+          <p:nvPr/>
+        </p:nvSpPr>
+        <p:spPr>
+          <a:xfrm>
+            <a:off x="3992728" y="3337560"/>
+            <a:ext cx="4206240" cy="960120"/>
+          </a:xfrm>
+          <a:prstGeom prst="roundRect">
+            <a:avLst>
+              <a:gd name="adj" fmla="val 6667"/>
+            </a:avLst>
+          </a:prstGeom>
+          <a:solidFill>
+            <a:srgbClr val="131A24"/>
+          </a:solidFill>
+          <a:ln w="12700">
+            <a:solidFill>
+              <a:srgbClr val="131A24"/>
+            </a:solidFill>
+            <a:prstDash val="solid"/>
+          </a:ln>
+          <a:effectLst>
+            <a:outerShdw sx="100000" sy="100000" kx="0" ky="0" algn="bl" rotWithShape="0" blurRad="88900" dist="25400" dir="5400000">
+              <a:srgbClr val="131A24">
+                <a:alpha val="16000"/>
+              </a:srgbClr>
+            </a:outerShdw>
+          </a:effectLst>
+        </p:spPr>
+      </p:sp>
+      <p:sp>
+        <p:nvSpPr>
+          <p:cNvPr id="13" name="Text 11"/>
+          <p:cNvSpPr txBox="1"/>
+          <p:nvPr/>
+        </p:nvSpPr>
+        <p:spPr>
+          <a:xfrm>
+            <a:off x="4221328" y="3337560"/>
+            <a:ext cx="3749040" cy="480060"/>
+          </a:xfrm>
+          <a:prstGeom prst="rect">
+            <a:avLst/>
+          </a:prstGeom>
+          <a:noFill/>
+          <a:ln/>
+        </p:spPr>
+        <p:txBody>
+          <a:bodyPr wrap="square" lIns="0" tIns="0" rIns="0" bIns="0" rtlCol="0" anchor="ctr"/>
+          <a:lstStyle/>
+          <a:p>
+            <a:pPr algn="ctr" indent="0" marL="0">
+              <a:buNone/>
+            </a:pPr>
+            <a:r>
+              <a:rPr lang="en-US" sz="1350" b="1" dirty="0">
+                <a:solidFill>
+                  <a:srgbClr val="FFFFFF"/>
+                </a:solidFill>
+                <a:latin typeface="Calibri" pitchFamily="34" charset="0"/>
+                <a:ea typeface="Calibri" pitchFamily="34" charset="-122"/>
+                <a:cs typeface="Calibri" pitchFamily="34" charset="-120"/>
+              </a:rPr>
+              <a:t>core/sirlab — hand-written, no SciPy</a:t>
+            </a:r>
+            <a:endParaRPr lang="en-US" sz="1350" dirty="0"/>
+          </a:p>
+        </p:txBody>
+      </p:sp>
+      <p:sp>
+        <p:nvSpPr>
+          <p:cNvPr id="14" name="Shape 12"/>
+          <p:cNvSpPr/>
+          <p:nvPr/>
+        </p:nvSpPr>
+        <p:spPr>
+          <a:xfrm>
+            <a:off x="4065880" y="3904488"/>
+            <a:ext cx="932688" cy="292608"/>
+          </a:xfrm>
+          <a:prstGeom prst="roundRect">
+            <a:avLst>
+              <a:gd name="adj" fmla="val 50000"/>
+            </a:avLst>
+          </a:prstGeom>
+          <a:solidFill>
+            <a:srgbClr val="24303F"/>
+          </a:solidFill>
+          <a:ln w="9525">
+            <a:solidFill>
+              <a:srgbClr val="3A4A5E"/>
+            </a:solidFill>
+            <a:prstDash val="solid"/>
+          </a:ln>
+        </p:spPr>
+      </p:sp>
+      <p:sp>
+        <p:nvSpPr>
+          <p:cNvPr id="15" name="Text 13"/>
+          <p:cNvSpPr txBox="1"/>
+          <p:nvPr/>
+        </p:nvSpPr>
+        <p:spPr>
+          <a:xfrm>
+            <a:off x="4065880" y="3904488"/>
+            <a:ext cx="932688" cy="292608"/>
+          </a:xfrm>
+          <a:prstGeom prst="rect">
+            <a:avLst/>
+          </a:prstGeom>
+          <a:noFill/>
+          <a:ln/>
+        </p:spPr>
+        <p:txBody>
+          <a:bodyPr wrap="square" lIns="0" tIns="0" rIns="0" bIns="0" rtlCol="0" anchor="ctr"/>
+          <a:lstStyle/>
+          <a:p>
+            <a:pPr algn="ctr" indent="0" marL="0">
+              <a:buNone/>
+            </a:pPr>
+            <a:r>
+              <a:rPr lang="en-US" sz="1050" dirty="0">
+                <a:solidFill>
+                  <a:srgbClr val="D8E0EC"/>
+                </a:solidFill>
+                <a:latin typeface="Courier New" pitchFamily="34" charset="0"/>
+                <a:ea typeface="Courier New" pitchFamily="34" charset="-122"/>
+                <a:cs typeface="Courier New" pitchFamily="34" charset="-120"/>
+              </a:rPr>
+              <a:t>models</a:t>
+            </a:r>
+            <a:endParaRPr lang="en-US" sz="1050" dirty="0"/>
+          </a:p>
+        </p:txBody>
+      </p:sp>
+      <p:sp>
+        <p:nvSpPr>
+          <p:cNvPr id="16" name="Shape 14"/>
+          <p:cNvSpPr/>
+          <p:nvPr/>
+        </p:nvSpPr>
+        <p:spPr>
+          <a:xfrm>
+            <a:off x="5108296" y="3904488"/>
+            <a:ext cx="932688" cy="292608"/>
+          </a:xfrm>
+          <a:prstGeom prst="roundRect">
+            <a:avLst>
+              <a:gd name="adj" fmla="val 50000"/>
+            </a:avLst>
+          </a:prstGeom>
+          <a:solidFill>
+            <a:srgbClr val="24303F"/>
+          </a:solidFill>
+          <a:ln w="9525">
+            <a:solidFill>
+              <a:srgbClr val="3A4A5E"/>
+            </a:solidFill>
+            <a:prstDash val="solid"/>
+          </a:ln>
+        </p:spPr>
+      </p:sp>
+      <p:sp>
+        <p:nvSpPr>
+          <p:cNvPr id="17" name="Text 15"/>
+          <p:cNvSpPr txBox="1"/>
+          <p:nvPr/>
+        </p:nvSpPr>
+        <p:spPr>
+          <a:xfrm>
+            <a:off x="5108296" y="3904488"/>
+            <a:ext cx="932688" cy="292608"/>
+          </a:xfrm>
+          <a:prstGeom prst="rect">
+            <a:avLst/>
+          </a:prstGeom>
+          <a:noFill/>
+          <a:ln/>
+        </p:spPr>
+        <p:txBody>
+          <a:bodyPr wrap="square" lIns="0" tIns="0" rIns="0" bIns="0" rtlCol="0" anchor="ctr"/>
+          <a:lstStyle/>
+          <a:p>
+            <a:pPr algn="ctr" indent="0" marL="0">
+              <a:buNone/>
+            </a:pPr>
+            <a:r>
+              <a:rPr lang="en-US" sz="1050" dirty="0">
+                <a:solidFill>
+                  <a:srgbClr val="D8E0EC"/>
+                </a:solidFill>
+                <a:latin typeface="Courier New" pitchFamily="34" charset="0"/>
+                <a:ea typeface="Courier New" pitchFamily="34" charset="-122"/>
+                <a:cs typeface="Courier New" pitchFamily="34" charset="-120"/>
+              </a:rPr>
+              <a:t>solvers</a:t>
+            </a:r>
+            <a:endParaRPr lang="en-US" sz="1050" dirty="0"/>
+          </a:p>
+        </p:txBody>
+      </p:sp>
+      <p:sp>
+        <p:nvSpPr>
+          <p:cNvPr id="18" name="Shape 16"/>
+          <p:cNvSpPr/>
+          <p:nvPr/>
+        </p:nvSpPr>
+        <p:spPr>
+          <a:xfrm>
+            <a:off x="6150712" y="3904488"/>
+            <a:ext cx="932688" cy="292608"/>
+          </a:xfrm>
+          <a:prstGeom prst="roundRect">
+            <a:avLst>
+              <a:gd name="adj" fmla="val 50000"/>
+            </a:avLst>
+          </a:prstGeom>
+          <a:solidFill>
+            <a:srgbClr val="24303F"/>
+          </a:solidFill>
+          <a:ln w="9525">
+            <a:solidFill>
+              <a:srgbClr val="3A4A5E"/>
+            </a:solidFill>
+            <a:prstDash val="solid"/>
+          </a:ln>
+        </p:spPr>
+      </p:sp>
+      <p:sp>
+        <p:nvSpPr>
+          <p:cNvPr id="19" name="Text 17"/>
+          <p:cNvSpPr txBox="1"/>
+          <p:nvPr/>
+        </p:nvSpPr>
+        <p:spPr>
+          <a:xfrm>
+            <a:off x="6150712" y="3904488"/>
+            <a:ext cx="932688" cy="292608"/>
+          </a:xfrm>
+          <a:prstGeom prst="rect">
+            <a:avLst/>
+          </a:prstGeom>
+          <a:noFill/>
+          <a:ln/>
+        </p:spPr>
+        <p:txBody>
+          <a:bodyPr wrap="square" lIns="0" tIns="0" rIns="0" bIns="0" rtlCol="0" anchor="ctr"/>
+          <a:lstStyle/>
+          <a:p>
+            <a:pPr algn="ctr" indent="0" marL="0">
+              <a:buNone/>
+            </a:pPr>
+            <a:r>
+              <a:rPr lang="en-US" sz="1050" dirty="0">
+                <a:solidFill>
+                  <a:srgbClr val="D8E0EC"/>
+                </a:solidFill>
+                <a:latin typeface="Courier New" pitchFamily="34" charset="0"/>
+                <a:ea typeface="Courier New" pitchFamily="34" charset="-122"/>
+                <a:cs typeface="Courier New" pitchFamily="34" charset="-120"/>
+              </a:rPr>
+              <a:t>estimate</a:t>
+            </a:r>
+            <a:endParaRPr lang="en-US" sz="1050" dirty="0"/>
+          </a:p>
+        </p:txBody>
+      </p:sp>
+      <p:sp>
+        <p:nvSpPr>
+          <p:cNvPr id="20" name="Shape 18"/>
+          <p:cNvSpPr/>
+          <p:nvPr/>
+        </p:nvSpPr>
+        <p:spPr>
+          <a:xfrm>
+            <a:off x="7193128" y="3904488"/>
+            <a:ext cx="932688" cy="292608"/>
+          </a:xfrm>
+          <a:prstGeom prst="roundRect">
+            <a:avLst>
+              <a:gd name="adj" fmla="val 50000"/>
+            </a:avLst>
+          </a:prstGeom>
+          <a:solidFill>
+            <a:srgbClr val="24303F"/>
+          </a:solidFill>
+          <a:ln w="9525">
+            <a:solidFill>
+              <a:srgbClr val="3A4A5E"/>
+            </a:solidFill>
+            <a:prstDash val="solid"/>
+          </a:ln>
+        </p:spPr>
+      </p:sp>
+      <p:sp>
+        <p:nvSpPr>
+          <p:cNvPr id="21" name="Text 19"/>
+          <p:cNvSpPr txBox="1"/>
+          <p:nvPr/>
+        </p:nvSpPr>
+        <p:spPr>
+          <a:xfrm>
+            <a:off x="7193128" y="3904488"/>
+            <a:ext cx="932688" cy="292608"/>
+          </a:xfrm>
+          <a:prstGeom prst="rect">
+            <a:avLst/>
+          </a:prstGeom>
+          <a:noFill/>
+          <a:ln/>
+        </p:spPr>
+        <p:txBody>
+          <a:bodyPr wrap="square" lIns="0" tIns="0" rIns="0" bIns="0" rtlCol="0" anchor="ctr"/>
+          <a:lstStyle/>
+          <a:p>
+            <a:pPr algn="ctr" indent="0" marL="0">
+              <a:buNone/>
+            </a:pPr>
+            <a:r>
+              <a:rPr lang="en-US" sz="1050" dirty="0">
+                <a:solidFill>
+                  <a:srgbClr val="D8E0EC"/>
+                </a:solidFill>
+                <a:latin typeface="Courier New" pitchFamily="34" charset="0"/>
+                <a:ea typeface="Courier New" pitchFamily="34" charset="-122"/>
+                <a:cs typeface="Courier New" pitchFamily="34" charset="-120"/>
+              </a:rPr>
+              <a:t>uq</a:t>
+            </a:r>
+            <a:endParaRPr lang="en-US" sz="1050" dirty="0"/>
+          </a:p>
+        </p:txBody>
+      </p:sp>
+      <p:sp>
+        <p:nvSpPr>
+          <p:cNvPr id="22" name="Text 20"/>
+          <p:cNvSpPr txBox="1"/>
+          <p:nvPr/>
+        </p:nvSpPr>
+        <p:spPr>
+          <a:xfrm>
+            <a:off x="5821528" y="4315968"/>
+            <a:ext cx="548640" cy="256032"/>
+          </a:xfrm>
+          <a:prstGeom prst="rect">
+            <a:avLst/>
+          </a:prstGeom>
+          <a:noFill/>
+          <a:ln/>
+        </p:spPr>
+        <p:txBody>
+          <a:bodyPr wrap="square" lIns="0" tIns="0" rIns="0" bIns="0" rtlCol="0" anchor="ctr"/>
+          <a:lstStyle/>
+          <a:p>
+            <a:pPr algn="ctr" indent="0" marL="0">
+              <a:buNone/>
+            </a:pPr>
+            <a:r>
+              <a:rPr lang="en-US" sz="1600" dirty="0">
+                <a:solidFill>
+                  <a:srgbClr val="7C8AA0"/>
+                </a:solidFill>
+                <a:latin typeface="Calibri" pitchFamily="34" charset="0"/>
+                <a:ea typeface="Calibri" pitchFamily="34" charset="-122"/>
+                <a:cs typeface="Calibri" pitchFamily="34" charset="-120"/>
+              </a:rPr>
+              <a:t>↓</a:t>
+            </a:r>
+            <a:endParaRPr lang="en-US" sz="1600" dirty="0"/>
+          </a:p>
+        </p:txBody>
+      </p:sp>
+      <p:sp>
+        <p:nvSpPr>
+          <p:cNvPr id="23" name="Shape 21"/>
+          <p:cNvSpPr/>
+          <p:nvPr/>
+        </p:nvSpPr>
+        <p:spPr>
+          <a:xfrm>
+            <a:off x="3992728" y="4590288"/>
+            <a:ext cx="4206240" cy="530352"/>
+          </a:xfrm>
+          <a:prstGeom prst="roundRect">
+            <a:avLst>
+              <a:gd name="adj" fmla="val 12069"/>
+            </a:avLst>
+          </a:prstGeom>
+          <a:solidFill>
+            <a:srgbClr val="FFFFFF"/>
+          </a:solidFill>
+          <a:ln w="12700">
+            <a:solidFill>
+              <a:srgbClr val="DDE3EC"/>
+            </a:solidFill>
+            <a:prstDash val="solid"/>
+          </a:ln>
+          <a:effectLst>
+            <a:outerShdw sx="100000" sy="100000" kx="0" ky="0" algn="bl" rotWithShape="0" blurRad="88900" dist="25400" dir="5400000">
+              <a:srgbClr val="131A24">
+                <a:alpha val="16000"/>
+              </a:srgbClr>
+            </a:outerShdw>
+          </a:effectLst>
+        </p:spPr>
+      </p:sp>
+      <p:sp>
+        <p:nvSpPr>
+          <p:cNvPr id="24" name="Text 22"/>
+          <p:cNvSpPr txBox="1"/>
+          <p:nvPr/>
+        </p:nvSpPr>
+        <p:spPr>
+          <a:xfrm>
+            <a:off x="4221328" y="4590288"/>
+            <a:ext cx="3749040" cy="291694"/>
+          </a:xfrm>
+          <a:prstGeom prst="rect">
+            <a:avLst/>
+          </a:prstGeom>
+          <a:noFill/>
+          <a:ln/>
+        </p:spPr>
+        <p:txBody>
+          <a:bodyPr wrap="square" lIns="0" tIns="0" rIns="0" bIns="0" rtlCol="0" anchor="b"/>
+          <a:lstStyle/>
+          <a:p>
+            <a:pPr algn="ctr" indent="0" marL="0">
+              <a:buNone/>
+            </a:pPr>
+            <a:r>
+              <a:rPr lang="en-US" sz="1350" b="1" dirty="0">
+                <a:solidFill>
+                  <a:srgbClr val="131A24"/>
+                </a:solidFill>
+                <a:latin typeface="Calibri" pitchFamily="34" charset="0"/>
+                <a:ea typeface="Calibri" pitchFamily="34" charset="-122"/>
+                <a:cs typeface="Calibri" pitchFamily="34" charset="-120"/>
+              </a:rPr>
+              <a:t>results/*.json</a:t>
+            </a:r>
+            <a:endParaRPr lang="en-US" sz="1350" dirty="0"/>
+          </a:p>
+        </p:txBody>
+      </p:sp>
+      <p:sp>
+        <p:nvSpPr>
+          <p:cNvPr id="25" name="Text 23"/>
+          <p:cNvSpPr txBox="1"/>
+          <p:nvPr/>
+        </p:nvSpPr>
+        <p:spPr>
+          <a:xfrm>
+            <a:off x="4221328" y="4855464"/>
+            <a:ext cx="3749040" cy="238658"/>
+          </a:xfrm>
+          <a:prstGeom prst="rect">
+            <a:avLst/>
+          </a:prstGeom>
+          <a:noFill/>
+          <a:ln/>
+        </p:spPr>
+        <p:txBody>
+          <a:bodyPr wrap="square" lIns="0" tIns="0" rIns="0" bIns="0" rtlCol="0" anchor="t"/>
+          <a:lstStyle/>
+          <a:p>
+            <a:pPr algn="ctr" indent="0" marL="0">
+              <a:buNone/>
+            </a:pPr>
+            <a:r>
+              <a:rPr lang="en-US" sz="1000" dirty="0">
+                <a:solidFill>
+                  <a:srgbClr val="7C8AA0"/>
+                </a:solidFill>
+                <a:latin typeface="Courier New" pitchFamily="34" charset="0"/>
+                <a:ea typeface="Courier New" pitchFamily="34" charset="-122"/>
+                <a:cs typeface="Courier New" pitchFamily="34" charset="-120"/>
+              </a:rPr>
+              <a:t>content-hash cached · seeded · git-SHA tagged</a:t>
+            </a:r>
+            <a:endParaRPr lang="en-US" sz="1000" dirty="0"/>
+          </a:p>
+        </p:txBody>
+      </p:sp>
+      <p:sp>
+        <p:nvSpPr>
+          <p:cNvPr id="26" name="Shape 24"/>
+          <p:cNvSpPr/>
+          <p:nvPr/>
+        </p:nvSpPr>
+        <p:spPr>
+          <a:xfrm>
+            <a:off x="6082132" y="5120640"/>
+            <a:ext cx="27432" cy="292608"/>
+          </a:xfrm>
+          <a:prstGeom prst="rect">
+            <a:avLst/>
+          </a:prstGeom>
+          <a:solidFill>
+            <a:srgbClr val="DDE3EC"/>
+          </a:solidFill>
+          <a:ln/>
+        </p:spPr>
+      </p:sp>
+      <p:sp>
+        <p:nvSpPr>
+          <p:cNvPr id="27" name="Shape 25"/>
+          <p:cNvSpPr/>
+          <p:nvPr/>
+        </p:nvSpPr>
+        <p:spPr>
+          <a:xfrm>
+            <a:off x="4427068" y="5413248"/>
+            <a:ext cx="3337560" cy="27432"/>
+          </a:xfrm>
+          <a:prstGeom prst="rect">
+            <a:avLst/>
+          </a:prstGeom>
+          <a:solidFill>
+            <a:srgbClr val="DDE3EC"/>
+          </a:solidFill>
+          <a:ln/>
+        </p:spPr>
+      </p:sp>
+      <p:sp>
+        <p:nvSpPr>
+          <p:cNvPr id="28" name="Shape 26"/>
+          <p:cNvSpPr/>
+          <p:nvPr/>
+        </p:nvSpPr>
+        <p:spPr>
+          <a:xfrm>
+            <a:off x="4413352" y="5413248"/>
+            <a:ext cx="27432" cy="274320"/>
+          </a:xfrm>
+          <a:prstGeom prst="rect">
+            <a:avLst/>
+          </a:prstGeom>
+          <a:solidFill>
+            <a:srgbClr val="DDE3EC"/>
+          </a:solidFill>
+          <a:ln/>
+        </p:spPr>
+      </p:sp>
+      <p:sp>
+        <p:nvSpPr>
+          <p:cNvPr id="29" name="Shape 27"/>
+          <p:cNvSpPr/>
+          <p:nvPr/>
+        </p:nvSpPr>
+        <p:spPr>
+          <a:xfrm>
+            <a:off x="7750912" y="5413248"/>
+            <a:ext cx="27432" cy="274320"/>
+          </a:xfrm>
+          <a:prstGeom prst="rect">
+            <a:avLst/>
+          </a:prstGeom>
+          <a:solidFill>
+            <a:srgbClr val="DDE3EC"/>
+          </a:solidFill>
+          <a:ln/>
+        </p:spPr>
+      </p:sp>
+      <p:sp>
+        <p:nvSpPr>
+          <p:cNvPr id="30" name="Shape 28"/>
+          <p:cNvSpPr/>
+          <p:nvPr/>
+        </p:nvSpPr>
+        <p:spPr>
+          <a:xfrm>
+            <a:off x="3009748" y="5687568"/>
+            <a:ext cx="2834640" cy="777240"/>
+          </a:xfrm>
+          <a:prstGeom prst="roundRect">
+            <a:avLst>
+              <a:gd name="adj" fmla="val 8235"/>
+            </a:avLst>
+          </a:prstGeom>
+          <a:solidFill>
+            <a:srgbClr val="FBEEEF"/>
+          </a:solidFill>
+          <a:ln w="12700">
+            <a:solidFill>
+              <a:srgbClr val="F1D3D6"/>
+            </a:solidFill>
+            <a:prstDash val="solid"/>
+          </a:ln>
+          <a:effectLst>
+            <a:outerShdw sx="100000" sy="100000" kx="0" ky="0" algn="bl" rotWithShape="0" blurRad="88900" dist="25400" dir="5400000">
+              <a:srgbClr val="131A24">
+                <a:alpha val="16000"/>
+              </a:srgbClr>
+            </a:outerShdw>
+          </a:effectLst>
+        </p:spPr>
+      </p:sp>
+      <p:sp>
+        <p:nvSpPr>
+          <p:cNvPr id="31" name="Text 29"/>
+          <p:cNvSpPr txBox="1"/>
+          <p:nvPr/>
+        </p:nvSpPr>
+        <p:spPr>
+          <a:xfrm>
+            <a:off x="3238348" y="5687568"/>
+            <a:ext cx="2377440" cy="427482"/>
+          </a:xfrm>
+          <a:prstGeom prst="rect">
+            <a:avLst/>
+          </a:prstGeom>
+          <a:noFill/>
+          <a:ln/>
+        </p:spPr>
+        <p:txBody>
+          <a:bodyPr wrap="square" lIns="0" tIns="0" rIns="0" bIns="0" rtlCol="0" anchor="b"/>
+          <a:lstStyle/>
+          <a:p>
+            <a:pPr algn="ctr" indent="0" marL="0">
+              <a:buNone/>
+            </a:pPr>
+            <a:r>
+              <a:rPr lang="en-US" sz="1350" b="1" dirty="0">
+                <a:solidFill>
+                  <a:srgbClr val="131A24"/>
+                </a:solidFill>
+                <a:latin typeface="Calibri" pitchFamily="34" charset="0"/>
+                <a:ea typeface="Calibri" pitchFamily="34" charset="-122"/>
+                <a:cs typeface="Calibri" pitchFamily="34" charset="-120"/>
+              </a:rPr>
+              <a:t>report figures</a:t>
+            </a:r>
+            <a:endParaRPr lang="en-US" sz="1350" dirty="0"/>
+          </a:p>
+        </p:txBody>
+      </p:sp>
+      <p:sp>
+        <p:nvSpPr>
+          <p:cNvPr id="32" name="Text 30"/>
+          <p:cNvSpPr txBox="1"/>
+          <p:nvPr/>
+        </p:nvSpPr>
+        <p:spPr>
+          <a:xfrm>
+            <a:off x="3238348" y="6076188"/>
+            <a:ext cx="2377440" cy="349758"/>
+          </a:xfrm>
+          <a:prstGeom prst="rect">
+            <a:avLst/>
+          </a:prstGeom>
+          <a:noFill/>
+          <a:ln/>
+        </p:spPr>
+        <p:txBody>
+          <a:bodyPr wrap="square" lIns="0" tIns="0" rIns="0" bIns="0" rtlCol="0" anchor="t"/>
+          <a:lstStyle/>
+          <a:p>
+            <a:pPr algn="ctr" indent="0" marL="0">
+              <a:buNone/>
+            </a:pPr>
+            <a:r>
+              <a:rPr lang="en-US" sz="1000" dirty="0">
+                <a:solidFill>
+                  <a:srgbClr val="7C8AA0"/>
+                </a:solidFill>
+                <a:latin typeface="Courier New" pitchFamily="34" charset="0"/>
+                <a:ea typeface="Courier New" pitchFamily="34" charset="-122"/>
+                <a:cs typeface="Courier New" pitchFamily="34" charset="-120"/>
+              </a:rPr>
+              <a:t>scripts/make_figures.py → the LaTeX report</a:t>
+            </a:r>
+            <a:endParaRPr lang="en-US" sz="1000" dirty="0"/>
+          </a:p>
+        </p:txBody>
+      </p:sp>
+      <p:sp>
+        <p:nvSpPr>
+          <p:cNvPr id="33" name="Shape 31"/>
+          <p:cNvSpPr/>
+          <p:nvPr/>
+        </p:nvSpPr>
+        <p:spPr>
+          <a:xfrm>
+            <a:off x="6347308" y="5687568"/>
+            <a:ext cx="2834640" cy="777240"/>
+          </a:xfrm>
+          <a:prstGeom prst="roundRect">
+            <a:avLst>
+              <a:gd name="adj" fmla="val 8235"/>
+            </a:avLst>
+          </a:prstGeom>
+          <a:solidFill>
+            <a:srgbClr val="EAF2EC"/>
+          </a:solidFill>
+          <a:ln w="12700">
+            <a:solidFill>
+              <a:srgbClr val="CFE3D5"/>
+            </a:solidFill>
+            <a:prstDash val="solid"/>
+          </a:ln>
+          <a:effectLst>
+            <a:outerShdw sx="100000" sy="100000" kx="0" ky="0" algn="bl" rotWithShape="0" blurRad="88900" dist="25400" dir="5400000">
+              <a:srgbClr val="131A24">
+                <a:alpha val="16000"/>
+              </a:srgbClr>
+            </a:outerShdw>
+          </a:effectLst>
+        </p:spPr>
+      </p:sp>
+      <p:sp>
+        <p:nvSpPr>
+          <p:cNvPr id="34" name="Text 32"/>
+          <p:cNvSpPr txBox="1"/>
+          <p:nvPr/>
+        </p:nvSpPr>
+        <p:spPr>
+          <a:xfrm>
+            <a:off x="6575908" y="5687568"/>
+            <a:ext cx="2377440" cy="427482"/>
+          </a:xfrm>
+          <a:prstGeom prst="rect">
+            <a:avLst/>
+          </a:prstGeom>
+          <a:noFill/>
+          <a:ln/>
+        </p:spPr>
+        <p:txBody>
+          <a:bodyPr wrap="square" lIns="0" tIns="0" rIns="0" bIns="0" rtlCol="0" anchor="b"/>
+          <a:lstStyle/>
+          <a:p>
+            <a:pPr algn="ctr" indent="0" marL="0">
+              <a:buNone/>
+            </a:pPr>
+            <a:r>
+              <a:rPr lang="en-US" sz="1350" b="1" dirty="0">
+                <a:solidFill>
+                  <a:srgbClr val="131A24"/>
+                </a:solidFill>
+                <a:latin typeface="Calibri" pitchFamily="34" charset="0"/>
+                <a:ea typeface="Calibri" pitchFamily="34" charset="-122"/>
+                <a:cs typeface="Calibri" pitchFamily="34" charset="-120"/>
+              </a:rPr>
+              <a:t>web dashboard</a:t>
+            </a:r>
+            <a:endParaRPr lang="en-US" sz="1350" dirty="0"/>
+          </a:p>
+        </p:txBody>
+      </p:sp>
+      <p:sp>
+        <p:nvSpPr>
+          <p:cNvPr id="35" name="Text 33"/>
+          <p:cNvSpPr txBox="1"/>
+          <p:nvPr/>
+        </p:nvSpPr>
+        <p:spPr>
+          <a:xfrm>
+            <a:off x="6575908" y="6076188"/>
+            <a:ext cx="2377440" cy="349758"/>
+          </a:xfrm>
+          <a:prstGeom prst="rect">
+            <a:avLst/>
+          </a:prstGeom>
+          <a:noFill/>
+          <a:ln/>
+        </p:spPr>
+        <p:txBody>
+          <a:bodyPr wrap="square" lIns="0" tIns="0" rIns="0" bIns="0" rtlCol="0" anchor="t"/>
+          <a:lstStyle/>
+          <a:p>
+            <a:pPr algn="ctr" indent="0" marL="0">
+              <a:buNone/>
+            </a:pPr>
+            <a:r>
+              <a:rPr lang="en-US" sz="1000" dirty="0">
+                <a:solidFill>
+                  <a:srgbClr val="7C8AA0"/>
+                </a:solidFill>
+                <a:latin typeface="Courier New" pitchFamily="34" charset="0"/>
+                <a:ea typeface="Courier New" pitchFamily="34" charset="-122"/>
+                <a:cs typeface="Courier New" pitchFamily="34" charset="-120"/>
+              </a:rPr>
+              <a:t>live, interactive — deployed for this defense</a:t>
+            </a:r>
+            <a:endParaRPr lang="en-US" sz="1000" dirty="0"/>
+          </a:p>
+        </p:txBody>
+      </p:sp>
+    </p:spTree>
+  </p:cSld>
+  <p:clrMapOvr>
+    <a:masterClrMapping/>
+  </p:clrMapOvr>
+</p:sld>
+</file>
+
+<file path=ppt/slides/slide6.xml><?xml version="1.0" encoding="utf-8"?>
+<p:sld xmlns:a="http://schemas.openxmlformats.org/drawingml/2006/main" xmlns:r="http://schemas.openxmlformats.org/officeDocument/2006/relationships" xmlns:p="http://schemas.openxmlformats.org/presentationml/2006/main">
+  <p:cSld name="Slide 6">
+    <p:bg>
+      <p:bgPr>
+        <a:solidFill>
+          <a:srgbClr val="F4F6FA"/>
+        </a:solidFill>
+      </p:bgPr>
+    </p:bg>
+    <p:spTree>
+      <p:nvGrpSpPr>
+        <p:cNvPr id="1" name=""/>
+        <p:cNvGrpSpPr/>
+        <p:nvPr/>
+      </p:nvGrpSpPr>
+      <p:grpSpPr>
+        <a:xfrm>
+          <a:off x="0" y="0"/>
+          <a:ext cx="0" cy="0"/>
+          <a:chOff x="0" y="0"/>
+          <a:chExt cx="0" cy="0"/>
+        </a:xfrm>
+      </p:grpSpPr>
+      <p:sp>
+        <p:nvSpPr>
+          <p:cNvPr id="2" name="Text 0"/>
+          <p:cNvSpPr txBox="1"/>
+          <p:nvPr/>
+        </p:nvSpPr>
+        <p:spPr>
+          <a:xfrm>
+            <a:off x="502920" y="502920"/>
+            <a:ext cx="7315200" cy="320040"/>
+          </a:xfrm>
+          <a:prstGeom prst="rect">
+            <a:avLst/>
+          </a:prstGeom>
+          <a:noFill/>
+          <a:ln/>
+        </p:spPr>
+        <p:txBody>
+          <a:bodyPr wrap="square" lIns="0" tIns="0" rIns="0" bIns="0" rtlCol="0" anchor="ctr"/>
+          <a:lstStyle/>
+          <a:p>
+            <a:pPr indent="0" marL="0">
+              <a:buNone/>
+            </a:pPr>
+            <a:r>
+              <a:rPr lang="en-US" sz="1250" b="1" spc="200" kern="0" dirty="0">
+                <a:solidFill>
+                  <a:srgbClr val="D43F4E"/>
+                </a:solidFill>
+                <a:latin typeface="Calibri" pitchFamily="34" charset="0"/>
+                <a:ea typeface="Calibri" pitchFamily="34" charset="-122"/>
+                <a:cs typeface="Calibri" pitchFamily="34" charset="-120"/>
+              </a:rPr>
+              <a:t>WHAT WE FOUND</a:t>
+            </a:r>
+            <a:endParaRPr lang="en-US" sz="1250" dirty="0"/>
+          </a:p>
+        </p:txBody>
+      </p:sp>
+      <p:sp>
+        <p:nvSpPr>
+          <p:cNvPr id="3" name="Text 1"/>
+          <p:cNvSpPr txBox="1"/>
+          <p:nvPr/>
+        </p:nvSpPr>
+        <p:spPr>
+          <a:xfrm>
+            <a:off x="502920" y="868680"/>
+            <a:ext cx="11155680" cy="685800"/>
+          </a:xfrm>
+          <a:prstGeom prst="rect">
+            <a:avLst/>
+          </a:prstGeom>
+          <a:noFill/>
+          <a:ln/>
+        </p:spPr>
+        <p:txBody>
+          <a:bodyPr wrap="square" lIns="0" tIns="0" rIns="0" bIns="0" rtlCol="0" anchor="ctr"/>
+          <a:lstStyle/>
+          <a:p>
+            <a:pPr indent="0" marL="0">
+              <a:buNone/>
+            </a:pPr>
+            <a:r>
+              <a:rPr lang="en-US" sz="2500" b="1" dirty="0">
+                <a:solidFill>
+                  <a:srgbClr val="131A24"/>
+                </a:solidFill>
+                <a:latin typeface="Cambria" pitchFamily="34" charset="0"/>
+                <a:ea typeface="Cambria" pitchFamily="34" charset="-122"/>
+                <a:cs typeface="Cambria" pitchFamily="34" charset="-120"/>
+              </a:rPr>
+              <a:t>Solver error behaves exactly like the textbook says</a:t>
+            </a:r>
+            <a:endParaRPr lang="en-US" sz="2500" dirty="0"/>
+          </a:p>
+        </p:txBody>
+      </p:sp>
+      <p:sp>
+        <p:nvSpPr>
+          <p:cNvPr id="4" name="Shape 2"/>
+          <p:cNvSpPr/>
+          <p:nvPr/>
+        </p:nvSpPr>
+        <p:spPr>
+          <a:xfrm>
+            <a:off x="393192" y="1627632"/>
+            <a:ext cx="6025896" cy="5107573"/>
+          </a:xfrm>
+          <a:prstGeom prst="roundRect">
+            <a:avLst>
+              <a:gd name="adj" fmla="val 1074"/>
+            </a:avLst>
+          </a:prstGeom>
+          <a:solidFill>
+            <a:srgbClr val="FFFFFF"/>
+          </a:solidFill>
+          <a:ln w="12700">
+            <a:solidFill>
+              <a:srgbClr val="DDE3EC"/>
+            </a:solidFill>
+            <a:prstDash val="solid"/>
+          </a:ln>
+          <a:effectLst>
+            <a:outerShdw sx="100000" sy="100000" kx="0" ky="0" algn="bl" rotWithShape="0" blurRad="88900" dist="25400" dir="5400000">
+              <a:srgbClr val="131A24">
+                <a:alpha val="16000"/>
+              </a:srgbClr>
+            </a:outerShdw>
+          </a:effectLst>
+        </p:spPr>
+      </p:sp>
       <p:pic>
         <p:nvPicPr>
           <p:cNvPr id="5" name="Image 0" descr="/home/schatten/Desktop/4-1/Lab/CSE 402/CSE402-Project/deck/assets/e01_convergence.png">    </p:cNvPr>
@@ -5621,9 +6914,9 @@
 </p:sld>
 </file>
 
-<file path=ppt/slides/slide6.xml><?xml version="1.0" encoding="utf-8"?>
+<file path=ppt/slides/slide7.xml><?xml version="1.0" encoding="utf-8"?>
 <p:sld xmlns:a="http://schemas.openxmlformats.org/drawingml/2006/main" xmlns:r="http://schemas.openxmlformats.org/officeDocument/2006/relationships" xmlns:p="http://schemas.openxmlformats.org/presentationml/2006/main">
-  <p:cSld name="Slide 6">
+  <p:cSld name="Slide 7">
     <p:bg>
       <p:bgPr>
         <a:solidFill>
